--- a/submissions/initial-phases/B_Business_Case/ClassMic_B2_Three_Slides.pptx
+++ b/submissions/initial-phases/B_Business_Case/ClassMic_B2_Three_Slides.pptx
@@ -2,39 +2,39 @@
 <file path=ppt/presentation.xml><?xml version="1.0" encoding="utf-8"?>
 <p:presentation xmlns:p="http://schemas.openxmlformats.org/presentationml/2006/main" embedTrueTypeFonts="1" saveSubsetFonts="0">
   <p:sldMasterIdLst>
-    <p:sldMasterId xmlns:r="http://schemas.openxmlformats.org/officeDocument/2006/relationships" id="2147483648" r:id="Rd66b40cfb99540e5"/>
+    <p:sldMasterId xmlns:r="http://schemas.openxmlformats.org/officeDocument/2006/relationships" id="2147483648" r:id="Rc519d1f7f97e4bcb"/>
   </p:sldMasterIdLst>
   <p:notesMasterIdLst>
-    <p:notesMasterId xmlns:r="http://schemas.openxmlformats.org/officeDocument/2006/relationships" r:id="R7c8ca515ded74414"/>
+    <p:notesMasterId xmlns:r="http://schemas.openxmlformats.org/officeDocument/2006/relationships" r:id="R19fe2e419ce54047"/>
   </p:notesMasterIdLst>
   <p:sldIdLst>
-    <p:sldId xmlns:r="http://schemas.openxmlformats.org/officeDocument/2006/relationships" id="256" r:id="R7c0a21f68bd44553"/>
-    <p:sldId xmlns:r="http://schemas.openxmlformats.org/officeDocument/2006/relationships" id="257" r:id="R843ea24f130940a5"/>
-    <p:sldId xmlns:r="http://schemas.openxmlformats.org/officeDocument/2006/relationships" id="258" r:id="R9f292001244346a4"/>
+    <p:sldId xmlns:r="http://schemas.openxmlformats.org/officeDocument/2006/relationships" id="256" r:id="R990380ddf7a34a4a"/>
+    <p:sldId xmlns:r="http://schemas.openxmlformats.org/officeDocument/2006/relationships" id="257" r:id="R55e7d9f2f959441c"/>
+    <p:sldId xmlns:r="http://schemas.openxmlformats.org/officeDocument/2006/relationships" id="258" r:id="Re33fc3ee91084837"/>
   </p:sldIdLst>
   <p:sldSz cx="12192000" cy="6858000"/>
   <p:notesSz cx="6858000" cy="9144000"/>
   <p:embeddedFontLst>
     <p:embeddedFont>
       <p:font typeface="Inter"/>
-      <p:regular xmlns:r="http://schemas.openxmlformats.org/officeDocument/2006/relationships" r:id="Rfe353edc023249ce"/>
-      <p:bold xmlns:r="http://schemas.openxmlformats.org/officeDocument/2006/relationships" r:id="R3add18e28ae64752"/>
+      <p:regular xmlns:r="http://schemas.openxmlformats.org/officeDocument/2006/relationships" r:id="Rbbb1a91465f54caa"/>
+      <p:bold xmlns:r="http://schemas.openxmlformats.org/officeDocument/2006/relationships" r:id="R7a26ceb7334f42eb"/>
     </p:embeddedFont>
     <p:embeddedFont>
       <p:font typeface="Inter Medium"/>
-      <p:regular xmlns:r="http://schemas.openxmlformats.org/officeDocument/2006/relationships" r:id="Rb080f6e6fbdb43f2"/>
+      <p:regular xmlns:r="http://schemas.openxmlformats.org/officeDocument/2006/relationships" r:id="R2ed09d924f474dad"/>
     </p:embeddedFont>
     <p:embeddedFont>
       <p:font typeface="Inter SemiBold"/>
-      <p:regular xmlns:r="http://schemas.openxmlformats.org/officeDocument/2006/relationships" r:id="R401c1fdfcafd4ebb"/>
-      <p:bold xmlns:r="http://schemas.openxmlformats.org/officeDocument/2006/relationships" r:id="R0fe8d622f7114c97"/>
+      <p:regular xmlns:r="http://schemas.openxmlformats.org/officeDocument/2006/relationships" r:id="R437742c0b72b457b"/>
+      <p:bold xmlns:r="http://schemas.openxmlformats.org/officeDocument/2006/relationships" r:id="Rb4683aa36a2c4531"/>
     </p:embeddedFont>
     <p:embeddedFont>
       <p:font typeface="OpenAI Sans"/>
-      <p:regular xmlns:r="http://schemas.openxmlformats.org/officeDocument/2006/relationships" r:id="R72b6188a8283485d"/>
-      <p:bold xmlns:r="http://schemas.openxmlformats.org/officeDocument/2006/relationships" r:id="Ra816e888943d447d"/>
-      <p:italic xmlns:r="http://schemas.openxmlformats.org/officeDocument/2006/relationships" r:id="Rfff56ee6b13c49fe"/>
-      <p:boldItalic xmlns:r="http://schemas.openxmlformats.org/officeDocument/2006/relationships" r:id="R6507012a4af04f5e"/>
+      <p:regular xmlns:r="http://schemas.openxmlformats.org/officeDocument/2006/relationships" r:id="R5e913a0729624129"/>
+      <p:bold xmlns:r="http://schemas.openxmlformats.org/officeDocument/2006/relationships" r:id="R182f6c4db4a949f2"/>
+      <p:italic xmlns:r="http://schemas.openxmlformats.org/officeDocument/2006/relationships" r:id="R6371a3945e8042a9"/>
+      <p:boldItalic xmlns:r="http://schemas.openxmlformats.org/officeDocument/2006/relationships" r:id="R6654126fb592425d"/>
     </p:embeddedFont>
   </p:embeddedFontLst>
 </p:presentation>
@@ -422,7 +422,7 @@
               <a:buNone/>
             </a:pPr>
             <a:r>
-              <a:t>Biamp Crowd Mics supports phone microphones and moderator control. Source: https://www.biamp.com/products/families/crowd-mics (accessed 17 September 2026). Commercial capability does not establish local demand or a quoted cost.</a:t>
+              <a:t>Biamp Crowd Mics offers phone microphones and moderator control. Source: https://www.biamp.com/products/families/crowd-mics (accessed 17 September 2026). A local supplier quote and classroom trial are still needed for a purchase comparison.</a:t>
             </a:r>
             <a:endParaRPr/>
           </a:p>
@@ -502,7 +502,7 @@
               <a:buNone/>
             </a:pPr>
             <a:r>
-              <a:t>Sources: https://www.biamp.com/products/families/crowd-mics and https://www.biamp.com/products/families/crowd-mics/faq (accessed 17 September 2026). The 100-hour and AED 0 estimates assume available student capacity and existing resources.</a:t>
+              <a:t>Sources: https://www.biamp.com/products/families/crowd-mics and https://www.biamp.com/products/families/crowd-mics/faq (accessed 17 September 2026). The prototype estimate assumes 100 available student hours and reuse of existing equipment.</a:t>
             </a:r>
             <a:endParaRPr/>
           </a:p>
@@ -573,7 +573,7 @@
           <a:lstStyle xmlns:a="http://schemas.openxmlformats.org/drawingml/2006/main"/>
           <a:p xmlns:a="http://schemas.openxmlformats.org/drawingml/2006/main">
             <a:r>
-              <a:t>Proposed planning review: 18 September. Two seven-day sprints: 19–25 September and 26 September–2 October. The product report is due 3 October at 00:00; execution evidence is due 4 October at 00:00. Closing work is due 10 October at 00:00.</a:t>
+              <a:t>The proposed planning review is on 18 September. Sprint 1 runs 19–25 September and Sprint 2 runs 26 September–2 October. The product report is due 3 October at 00:00, execution evidence on 4 October at 00:00 and closing work on 10 October at 00:00.</a:t>
             </a:r>
           </a:p>
         </p:txBody>
@@ -739,7 +739,7 @@
     <p:bg>
       <p:bgPr>
         <a:blipFill xmlns:a="http://schemas.openxmlformats.org/drawingml/2006/main" rotWithShape="1">
-          <a:blip xmlns:r="http://schemas.openxmlformats.org/officeDocument/2006/relationships" r:embed="R42866912bb6b4b17">
+          <a:blip xmlns:r="http://schemas.openxmlformats.org/officeDocument/2006/relationships" r:embed="Rdbfddb38cbfe43e7">
             <a:lum/>
           </a:blip>
           <a:srcRect l="0" t="0" r="0" b="0"/>
@@ -2279,7 +2279,7 @@
     <p:bg>
       <p:bgPr>
         <a:blipFill xmlns:a="http://schemas.openxmlformats.org/drawingml/2006/main" rotWithShape="1">
-          <a:blip xmlns:r="http://schemas.openxmlformats.org/officeDocument/2006/relationships" r:embed="R9ec6bc9e9cb94242">
+          <a:blip xmlns:r="http://schemas.openxmlformats.org/officeDocument/2006/relationships" r:embed="R446bc57fa2424364">
             <a:lum/>
           </a:blip>
           <a:srcRect l="0" t="0" r="0" b="0"/>
@@ -2523,16 +2523,16 @@
   </p:cSld>
   <p:clrMap bg1="lt1" tx1="dk1" bg2="lt2" tx2="dk2" accent1="accent1" accent2="accent2" accent3="accent3" accent4="accent4" accent5="accent5" accent6="accent6" hlink="hlink" folHlink="folHlink"/>
   <p:sldLayoutIdLst>
-    <p:sldLayoutId xmlns:r="http://schemas.openxmlformats.org/officeDocument/2006/relationships" id="2147483649" r:id="R77118fa6e9d940b8"/>
-    <p:sldLayoutId xmlns:r="http://schemas.openxmlformats.org/officeDocument/2006/relationships" id="2147483650" r:id="Rc3de12c08e324822"/>
-    <p:sldLayoutId xmlns:r="http://schemas.openxmlformats.org/officeDocument/2006/relationships" id="2147483651" r:id="Ra482a24832824001"/>
-    <p:sldLayoutId xmlns:r="http://schemas.openxmlformats.org/officeDocument/2006/relationships" id="2147483652" r:id="R2f2ac0a4d0d64617"/>
-    <p:sldLayoutId xmlns:r="http://schemas.openxmlformats.org/officeDocument/2006/relationships" id="2147483653" r:id="R4ed05e6808f34ec5"/>
-    <p:sldLayoutId xmlns:r="http://schemas.openxmlformats.org/officeDocument/2006/relationships" id="2147483654" r:id="R65b000aa74ce4271"/>
-    <p:sldLayoutId xmlns:r="http://schemas.openxmlformats.org/officeDocument/2006/relationships" id="2147483655" r:id="R3b39ba798a4248a1"/>
-    <p:sldLayoutId xmlns:r="http://schemas.openxmlformats.org/officeDocument/2006/relationships" id="2147483656" r:id="R59fe43dca97b4a2d"/>
-    <p:sldLayoutId xmlns:r="http://schemas.openxmlformats.org/officeDocument/2006/relationships" id="2147483657" r:id="Re05e24b77a57419e"/>
-    <p:sldLayoutId xmlns:r="http://schemas.openxmlformats.org/officeDocument/2006/relationships" id="2147483658" r:id="Rb8b255652af64c1b"/>
+    <p:sldLayoutId xmlns:r="http://schemas.openxmlformats.org/officeDocument/2006/relationships" id="2147483649" r:id="R817e9b4c5fc14e6d"/>
+    <p:sldLayoutId xmlns:r="http://schemas.openxmlformats.org/officeDocument/2006/relationships" id="2147483650" r:id="R0f4a7f9e64154d54"/>
+    <p:sldLayoutId xmlns:r="http://schemas.openxmlformats.org/officeDocument/2006/relationships" id="2147483651" r:id="Re1e6f57d8637420e"/>
+    <p:sldLayoutId xmlns:r="http://schemas.openxmlformats.org/officeDocument/2006/relationships" id="2147483652" r:id="Rd36f7b80337a40bc"/>
+    <p:sldLayoutId xmlns:r="http://schemas.openxmlformats.org/officeDocument/2006/relationships" id="2147483653" r:id="R24e747cacc144436"/>
+    <p:sldLayoutId xmlns:r="http://schemas.openxmlformats.org/officeDocument/2006/relationships" id="2147483654" r:id="R1797878657f7451c"/>
+    <p:sldLayoutId xmlns:r="http://schemas.openxmlformats.org/officeDocument/2006/relationships" id="2147483655" r:id="R8f5a1246729d4067"/>
+    <p:sldLayoutId xmlns:r="http://schemas.openxmlformats.org/officeDocument/2006/relationships" id="2147483656" r:id="R4a0caaf73a7f42e6"/>
+    <p:sldLayoutId xmlns:r="http://schemas.openxmlformats.org/officeDocument/2006/relationships" id="2147483657" r:id="R2bfbc8a235f743ae"/>
+    <p:sldLayoutId xmlns:r="http://schemas.openxmlformats.org/officeDocument/2006/relationships" id="2147483658" r:id="R2ebe54e152ae444b"/>
   </p:sldLayoutIdLst>
   <p:hf hdr="0" dt="0"/>
   <p:txStyles>
@@ -3487,7 +3487,7 @@
                 <a:ea typeface="Helvetica Neue"/>
                 <a:cs typeface="Helvetica Neue"/>
               </a:rPr>
-              <a:t>Test whether phone microphones make student contributions easier to hear than the current classroom workaround.</a:t>
+              <a:t>Test whether phone microphones make questions easier to hear than the current speaking process.</a:t>
             </a:r>
           </a:p>
         </p:txBody>
@@ -3927,7 +3927,7 @@
                 <a:ea typeface="Helvetica Neue"/>
                 <a:cs typeface="Helvetica Neue"/>
               </a:rPr>
-              <a:t>The course gains a focused project to investigate, build and evaluate. Institutional savings remain unproven.</a:t>
+              <a:t>The expected benefit is clearer questions with fewer interruptions. Local benefits and costs still need testing.</a:t>
             </a:r>
           </a:p>
         </p:txBody>
@@ -4807,7 +4807,7 @@
                 <a:ea typeface="Helvetica Neue"/>
                 <a:cs typeface="Helvetica Neue"/>
               </a:rPr>
-              <a:t>Biamp offers a similar core workflow. The case for custom work rests on course learning and testing the browser experience.</a:t>
+              <a:t>Biamp already offers phone microphones and moderation. A small custom prototype lets us test browser access and instructor controls.</a:t>
             </a:r>
           </a:p>
         </p:txBody>
@@ -5691,7 +5691,7 @@
                 <a:ea typeface="Helvetica Neue Medium"/>
                 <a:cs typeface="Helvetica Neue Medium"/>
               </a:rPr>
-              <a:t>A bounded comparison</a:t>
+              <a:t>Three options</a:t>
             </a:r>
           </a:p>
           <a:p xmlns:a="http://schemas.openxmlformats.org/drawingml/2006/main">
@@ -5716,18 +5716,7 @@
                 <a:ea typeface="Helvetica Neue"/>
                 <a:cs typeface="Helvetica Neue"/>
               </a:rPr>
-              <a:t>Commercial capability is documented. Prices, local fit and adoption still need validation. </a:t>
-            </a:r>
-            <a:r>
-              <a:rPr sz="1600">
-                <a:solidFill>
-                  <a:prstClr val="black"/>
-                </a:solidFill>
-                <a:latin typeface="Helvetica Neue"/>
-                <a:ea typeface="Helvetica Neue"/>
-                <a:cs typeface="Helvetica Neue"/>
-              </a:rPr>
-              <a:t>Compare classroom fit, costs, feasibility and support.</a:t>
+              <a:t>Compare changes to current practice, a commercial product and a custom prototype. Local costs and classroom performance are still unknown.</a:t>
             </a:r>
           </a:p>
         </p:txBody>
@@ -5940,7 +5929,7 @@
                           <a:ea typeface="Helvetica Neue Medium"/>
                           <a:cs typeface="Helvetica Neue Medium"/>
                         </a:rPr>
-                        <a:t>Cost position</a:t>
+                        <a:t>Cost</a:t>
                       </a:r>
                       <a:endParaRPr sz="1400" b="1">
                         <a:solidFill>
@@ -6099,7 +6088,7 @@
                           <a:ea typeface="Helvetica Neue"/>
                           <a:cs typeface="Helvetica Neue"/>
                         </a:rPr>
-                        <a:t>Improve current</a:t>
+                        <a:t>Improve current practice</a:t>
                       </a:r>
                       <a:endParaRPr sz="1400">
                         <a:solidFill>
@@ -6243,7 +6232,7 @@
                           <a:ea typeface="Helvetica Neue"/>
                           <a:cs typeface="Helvetica Neue"/>
                         </a:rPr>
-                        <a:t>No new platform assumed</a:t>
+                        <a:t>Uses existing equipment</a:t>
                       </a:r>
                       <a:endParaRPr sz="1400">
                         <a:solidFill>
@@ -6742,7 +6731,7 @@
                           <a:ea typeface="Helvetica Neue"/>
                           <a:cs typeface="Helvetica Neue"/>
                         </a:rPr>
-                        <a:t>Test a browser workflow and course learning</a:t>
+                        <a:t>Test browser access and instructor control</a:t>
                       </a:r>
                       <a:endParaRPr sz="1400">
                         <a:solidFill>
@@ -6811,8 +6800,40 @@
                           <a:ea typeface="Helvetica Neue"/>
                           <a:cs typeface="Helvetica Neue"/>
                         </a:rPr>
-                        <a:t>100 student hours proposed
-No new cash assumed</a:t>
+                        <a:t>100 student hours</a:t>
+                      </a:r>
+                      <a:endParaRPr sz="1400">
+                        <a:solidFill>
+                          <a:srgbClr val="000000"/>
+                        </a:solidFill>
+                        <a:latin typeface="+mn-lt"/>
+                        <a:ea typeface="+mn-lt"/>
+                        <a:cs typeface="+mn-lt"/>
+                      </a:endParaRPr>
+                    </a:p>
+                    <a:p>
+                      <a:pPr marL="0" lvl="0" indent="0" algn="l">
+                        <a:lnSpc>
+                          <a:spcPct val="105000"/>
+                        </a:lnSpc>
+                        <a:spcBef>
+                          <a:spcPts val="0"/>
+                        </a:spcBef>
+                        <a:spcAft>
+                          <a:spcPts val="0"/>
+                        </a:spcAft>
+                        <a:buNone/>
+                      </a:pPr>
+                      <a:r>
+                        <a:rPr sz="1600" b="0">
+                          <a:solidFill>
+                            <a:srgbClr val="000000"/>
+                          </a:solidFill>
+                          <a:latin typeface="Helvetica Neue"/>
+                          <a:ea typeface="Helvetica Neue"/>
+                          <a:cs typeface="Helvetica Neue"/>
+                        </a:rPr>
+                        <a:t>AED 0 additional cash</a:t>
                       </a:r>
                       <a:endParaRPr sz="1400">
                         <a:solidFill>
@@ -6970,7 +6991,7 @@
                 <a:ea typeface="Helvetica Neue"/>
                 <a:cs typeface="Helvetica Neue"/>
               </a:rPr>
-              <a:t>The evidence does not establish that custom development is cheaper or better for a university.</a:t>
+              <a:t>A campus purchase decision needs local tests and supplier quotes.</a:t>
             </a:r>
             <a:endParaRPr sz="1100"/>
           </a:p>
@@ -7624,7 +7645,7 @@
                 <a:ea typeface="Helvetica Neue"/>
                 <a:cs typeface="Helvetica Neue"/>
               </a:rPr>
-              <a:t>Complete five Must stories, timed trials and volunteer feedback. Report unmet targets, defects and the limits of the evidence.</a:t>
+              <a:t>Complete five required stories, run timed trials and collect volunteer feedback. Report defects and any missed targets.</a:t>
             </a:r>
             <a:endParaRPr sz="1800">
               <a:solidFill>
@@ -7877,7 +7898,7 @@
                 <a:ea typeface="Helvetica Neue"/>
                 <a:cs typeface="Helvetica Neue"/>
               </a:rPr>
-              <a:t>A live pilot needs validated demand, acceptable sound, a commercial comparison, named support and a funded authorization.</a:t>
+              <a:t>A classroom pilot needs evidence of demand, usable audio, a support owner and an approved budget. Compare commercial alternatives first.</a:t>
             </a:r>
             <a:endParaRPr sz="1800">
               <a:solidFill>
@@ -7931,7 +7952,7 @@
                 <a:ea typeface="Helvetica Neue"/>
                 <a:cs typeface="Helvetica Neue"/>
               </a:rPr>
-              <a:t>Product report due 3 October at 00:00; finish testing by 2 October.</a:t>
+              <a:t>Product report due 3 October at 00:00. Finish testing by 2 October.</a:t>
             </a:r>
             <a:endParaRPr sz="1100"/>
           </a:p>
